--- a/pitch/DISSENT_Nexus_Network.pptx
+++ b/pitch/DISSENT_Nexus_Network.pptx
@@ -2096,7 +2096,7 @@
               <a:buNone/>
             </a:pPr>
             <a:r>
-              <a:rPr lang="en-US" sz="13000" b="1" spc="-300" kern="0" dirty="0">
+              <a:rPr lang="en-US" sz="13000" spc="-390" kern="0" dirty="0">
                 <a:solidFill>
                   <a:srgbClr val="FFFFFF"/>
                 </a:solidFill>
@@ -2158,7 +2158,7 @@
               <a:buNone/>
             </a:pPr>
             <a:r>
-              <a:rPr lang="en-US" sz="3400" b="1" dirty="0">
+              <a:rPr lang="en-US" sz="3400" spc="-70" kern="0" dirty="0">
                 <a:solidFill>
                   <a:srgbClr val="FFFFFF"/>
                 </a:solidFill>
@@ -2178,7 +2178,7 @@
               <a:buNone/>
             </a:pPr>
             <a:r>
-              <a:rPr lang="en-US" sz="3400" b="1" dirty="0">
+              <a:rPr lang="en-US" sz="3400" spc="-70" kern="0" dirty="0">
                 <a:solidFill>
                   <a:srgbClr val="FFFFFF"/>
                 </a:solidFill>
@@ -2405,7 +2405,7 @@
               <a:buNone/>
             </a:pPr>
             <a:r>
-              <a:rPr lang="en-US" sz="25000" b="1" spc="-900" kern="0" dirty="0">
+              <a:rPr lang="en-US" sz="25000" spc="-900" kern="0" dirty="0">
                 <a:solidFill>
                   <a:srgbClr val="FFFFFF"/>
                 </a:solidFill>
@@ -2447,7 +2447,7 @@
               <a:buNone/>
             </a:pPr>
             <a:r>
-              <a:rPr lang="en-US" sz="3100" b="1" dirty="0">
+              <a:rPr lang="en-US" sz="3100" spc="-70" kern="0" dirty="0">
                 <a:solidFill>
                   <a:srgbClr val="FFFFFF"/>
                 </a:solidFill>
@@ -2467,7 +2467,7 @@
               <a:buNone/>
             </a:pPr>
             <a:r>
-              <a:rPr lang="en-US" sz="3100" b="1" dirty="0">
+              <a:rPr lang="en-US" sz="3100" spc="-70" kern="0" dirty="0">
                 <a:solidFill>
                   <a:srgbClr val="FFFFFF"/>
                 </a:solidFill>
@@ -2534,6 +2534,438 @@
 <file path=ppt/slides/slide11.xml><?xml version="1.0" encoding="utf-8"?>
 <p:sld xmlns:a="http://schemas.openxmlformats.org/drawingml/2006/main" xmlns:r="http://schemas.openxmlformats.org/officeDocument/2006/relationships" xmlns:p="http://schemas.openxmlformats.org/presentationml/2006/main">
   <p:cSld name="Slide 11">
+    <p:bg>
+      <p:bgPr>
+        <a:solidFill>
+          <a:srgbClr val="101418"/>
+        </a:solidFill>
+      </p:bgPr>
+    </p:bg>
+    <p:spTree>
+      <p:nvGrpSpPr>
+        <p:cNvPr id="1" name=""/>
+        <p:cNvGrpSpPr/>
+        <p:nvPr/>
+      </p:nvGrpSpPr>
+      <p:grpSpPr>
+        <a:xfrm>
+          <a:off x="0" y="0"/>
+          <a:ext cx="0" cy="0"/>
+          <a:chOff x="0" y="0"/>
+          <a:chExt cx="0" cy="0"/>
+        </a:xfrm>
+      </p:grpSpPr>
+      <p:sp>
+        <p:nvSpPr>
+          <p:cNvPr id="2" name="Text 0"/>
+          <p:cNvSpPr txBox="1"/>
+          <p:nvPr/>
+        </p:nvSpPr>
+        <p:spPr>
+          <a:xfrm>
+            <a:off x="822960" y="777240"/>
+            <a:ext cx="8229600" cy="237744"/>
+          </a:xfrm>
+          <a:prstGeom prst="rect">
+            <a:avLst/>
+          </a:prstGeom>
+          <a:noFill/>
+          <a:ln/>
+        </p:spPr>
+        <p:txBody>
+          <a:bodyPr wrap="square" lIns="0" tIns="0" rIns="0" bIns="0" rtlCol="0" anchor="t"/>
+          <a:lstStyle/>
+          <a:p>
+            <a:pPr algn="l" indent="0" marL="0">
+              <a:buNone/>
+            </a:pPr>
+            <a:r>
+              <a:rPr lang="en-US" sz="1000" b="1" spc="180" kern="0" dirty="0">
+                <a:solidFill>
+                  <a:srgbClr val="8A8F98"/>
+                </a:solidFill>
+                <a:latin typeface="Courier New" pitchFamily="34" charset="0"/>
+                <a:ea typeface="Courier New" pitchFamily="34" charset="-122"/>
+                <a:cs typeface="Courier New" pitchFamily="34" charset="-120"/>
+              </a:rPr>
+              <a:t>THE SAME 108 FAILURES, TWO WAYS OF CHOOSING</a:t>
+            </a:r>
+            <a:endParaRPr lang="en-US" sz="1000" dirty="0"/>
+          </a:p>
+        </p:txBody>
+      </p:sp>
+      <p:sp>
+        <p:nvSpPr>
+          <p:cNvPr id="3" name="Text 1"/>
+          <p:cNvSpPr txBox="1"/>
+          <p:nvPr/>
+        </p:nvSpPr>
+        <p:spPr>
+          <a:xfrm>
+            <a:off x="822960" y="1115568"/>
+            <a:ext cx="10545775" cy="822960"/>
+          </a:xfrm>
+          <a:prstGeom prst="rect">
+            <a:avLst/>
+          </a:prstGeom>
+          <a:noFill/>
+          <a:ln/>
+        </p:spPr>
+        <p:txBody>
+          <a:bodyPr wrap="square" lIns="0" tIns="0" rIns="0" bIns="0" rtlCol="0" anchor="t"/>
+          <a:lstStyle/>
+          <a:p>
+            <a:pPr indent="0" marL="0">
+              <a:lnSpc>
+                <a:spcPts val="4704"/>
+              </a:lnSpc>
+              <a:buNone/>
+            </a:pPr>
+            <a:r>
+              <a:rPr lang="en-US" sz="4200" spc="-80" kern="0" dirty="0">
+                <a:solidFill>
+                  <a:srgbClr val="FFFFFF"/>
+                </a:solidFill>
+                <a:latin typeface="Arial Black" pitchFamily="34" charset="0"/>
+                <a:ea typeface="Arial Black" pitchFamily="34" charset="-122"/>
+                <a:cs typeface="Arial Black" pitchFamily="34" charset="-120"/>
+              </a:rPr>
+              <a:t>One of them found none.</a:t>
+            </a:r>
+            <a:endParaRPr lang="en-US" sz="4200" dirty="0"/>
+          </a:p>
+        </p:txBody>
+      </p:sp>
+      <p:sp>
+        <p:nvSpPr>
+          <p:cNvPr id="4" name="Text 2"/>
+          <p:cNvSpPr txBox="1"/>
+          <p:nvPr/>
+        </p:nvSpPr>
+        <p:spPr>
+          <a:xfrm>
+            <a:off x="822960" y="2514600"/>
+            <a:ext cx="4892040" cy="274320"/>
+          </a:xfrm>
+          <a:prstGeom prst="rect">
+            <a:avLst/>
+          </a:prstGeom>
+          <a:noFill/>
+          <a:ln/>
+        </p:spPr>
+        <p:txBody>
+          <a:bodyPr wrap="square" lIns="0" tIns="0" rIns="0" bIns="0" rtlCol="0" anchor="ctr"/>
+          <a:lstStyle/>
+          <a:p>
+            <a:pPr indent="0" marL="0">
+              <a:buNone/>
+            </a:pPr>
+            <a:r>
+              <a:rPr lang="en-US" sz="1100" b="1" spc="180" kern="0" dirty="0">
+                <a:solidFill>
+                  <a:srgbClr val="8A8F98"/>
+                </a:solidFill>
+                <a:latin typeface="Courier New" pitchFamily="34" charset="0"/>
+                <a:ea typeface="Courier New" pitchFamily="34" charset="-122"/>
+                <a:cs typeface="Courier New" pitchFamily="34" charset="-120"/>
+              </a:rPr>
+              <a:t>SORT BY WORST RATING</a:t>
+            </a:r>
+            <a:endParaRPr lang="en-US" sz="1100" dirty="0"/>
+          </a:p>
+        </p:txBody>
+      </p:sp>
+      <p:sp>
+        <p:nvSpPr>
+          <p:cNvPr id="5" name="Text 3"/>
+          <p:cNvSpPr txBox="1"/>
+          <p:nvPr/>
+        </p:nvSpPr>
+        <p:spPr>
+          <a:xfrm>
+            <a:off x="731520" y="2898648"/>
+            <a:ext cx="4892040" cy="1920240"/>
+          </a:xfrm>
+          <a:prstGeom prst="rect">
+            <a:avLst/>
+          </a:prstGeom>
+          <a:noFill/>
+          <a:ln/>
+        </p:spPr>
+        <p:txBody>
+          <a:bodyPr wrap="square" lIns="0" tIns="0" rIns="0" bIns="0" rtlCol="0" anchor="ctr"/>
+          <a:lstStyle/>
+          <a:p>
+            <a:pPr indent="0" marL="0">
+              <a:buNone/>
+            </a:pPr>
+            <a:r>
+              <a:rPr lang="en-US" sz="16800" spc="-500" kern="0" dirty="0">
+                <a:solidFill>
+                  <a:srgbClr val="9AA0A8"/>
+                </a:solidFill>
+                <a:latin typeface="Arial Black" pitchFamily="34" charset="0"/>
+                <a:ea typeface="Arial Black" pitchFamily="34" charset="-122"/>
+                <a:cs typeface="Arial Black" pitchFamily="34" charset="-120"/>
+              </a:rPr>
+              <a:t>0</a:t>
+            </a:r>
+            <a:endParaRPr lang="en-US" sz="16800" dirty="0"/>
+          </a:p>
+        </p:txBody>
+      </p:sp>
+      <p:sp>
+        <p:nvSpPr>
+          <p:cNvPr id="6" name="Shape 4"/>
+          <p:cNvSpPr/>
+          <p:nvPr/>
+        </p:nvSpPr>
+        <p:spPr>
+          <a:xfrm>
+            <a:off x="822960" y="4983480"/>
+            <a:ext cx="4892040" cy="36576"/>
+          </a:xfrm>
+          <a:prstGeom prst="rect">
+            <a:avLst/>
+          </a:prstGeom>
+          <a:solidFill>
+            <a:srgbClr val="3A3E44"/>
+          </a:solidFill>
+          <a:ln/>
+        </p:spPr>
+      </p:sp>
+      <p:sp>
+        <p:nvSpPr>
+          <p:cNvPr id="7" name="Text 5"/>
+          <p:cNvSpPr txBox="1"/>
+          <p:nvPr/>
+        </p:nvSpPr>
+        <p:spPr>
+          <a:xfrm>
+            <a:off x="822960" y="5184648"/>
+            <a:ext cx="4709160" cy="914400"/>
+          </a:xfrm>
+          <a:prstGeom prst="rect">
+            <a:avLst/>
+          </a:prstGeom>
+          <a:noFill/>
+          <a:ln/>
+        </p:spPr>
+        <p:txBody>
+          <a:bodyPr wrap="square" lIns="0" tIns="0" rIns="0" bIns="0" rtlCol="0" anchor="t"/>
+          <a:lstStyle/>
+          <a:p>
+            <a:pPr indent="0" marL="0">
+              <a:lnSpc>
+                <a:spcPts val="2400"/>
+              </a:lnSpc>
+              <a:buNone/>
+            </a:pPr>
+            <a:r>
+              <a:rPr lang="en-US" sz="1550" dirty="0">
+                <a:solidFill>
+                  <a:srgbClr val="8A8F98"/>
+                </a:solidFill>
+                <a:latin typeface="Arial" pitchFamily="34" charset="0"/>
+                <a:ea typeface="Arial" pitchFamily="34" charset="-122"/>
+                <a:cs typeface="Arial" pitchFamily="34" charset="-120"/>
+              </a:rPr>
+              <a:t>It only ever looks at bridges the file already calls bad, so it never arrives.</a:t>
+            </a:r>
+            <a:endParaRPr lang="en-US" sz="1550" dirty="0"/>
+          </a:p>
+        </p:txBody>
+      </p:sp>
+      <p:sp>
+        <p:nvSpPr>
+          <p:cNvPr id="8" name="Text 6"/>
+          <p:cNvSpPr txBox="1"/>
+          <p:nvPr/>
+        </p:nvSpPr>
+        <p:spPr>
+          <a:xfrm>
+            <a:off x="6492240" y="2514600"/>
+            <a:ext cx="4892040" cy="274320"/>
+          </a:xfrm>
+          <a:prstGeom prst="rect">
+            <a:avLst/>
+          </a:prstGeom>
+          <a:noFill/>
+          <a:ln/>
+        </p:spPr>
+        <p:txBody>
+          <a:bodyPr wrap="square" lIns="0" tIns="0" rIns="0" bIns="0" rtlCol="0" anchor="ctr"/>
+          <a:lstStyle/>
+          <a:p>
+            <a:pPr indent="0" marL="0">
+              <a:buNone/>
+            </a:pPr>
+            <a:r>
+              <a:rPr lang="en-US" sz="1100" b="1" spc="180" kern="0" dirty="0">
+                <a:solidFill>
+                  <a:srgbClr val="E8412F"/>
+                </a:solidFill>
+                <a:latin typeface="Courier New" pitchFamily="34" charset="0"/>
+                <a:ea typeface="Courier New" pitchFamily="34" charset="-122"/>
+                <a:cs typeface="Courier New" pitchFamily="34" charset="-120"/>
+              </a:rPr>
+              <a:t>DISSENT</a:t>
+            </a:r>
+            <a:endParaRPr lang="en-US" sz="1100" dirty="0"/>
+          </a:p>
+        </p:txBody>
+      </p:sp>
+      <p:sp>
+        <p:nvSpPr>
+          <p:cNvPr id="9" name="Text 7"/>
+          <p:cNvSpPr txBox="1"/>
+          <p:nvPr/>
+        </p:nvSpPr>
+        <p:spPr>
+          <a:xfrm>
+            <a:off x="6400800" y="2898648"/>
+            <a:ext cx="4892040" cy="1920240"/>
+          </a:xfrm>
+          <a:prstGeom prst="rect">
+            <a:avLst/>
+          </a:prstGeom>
+          <a:noFill/>
+          <a:ln/>
+        </p:spPr>
+        <p:txBody>
+          <a:bodyPr wrap="square" lIns="0" tIns="0" rIns="0" bIns="0" rtlCol="0" anchor="ctr"/>
+          <a:lstStyle/>
+          <a:p>
+            <a:pPr indent="0" marL="0">
+              <a:buNone/>
+            </a:pPr>
+            <a:r>
+              <a:rPr lang="en-US" sz="16800" spc="-500" kern="0" dirty="0">
+                <a:solidFill>
+                  <a:srgbClr val="E8412F"/>
+                </a:solidFill>
+                <a:latin typeface="Arial Black" pitchFamily="34" charset="0"/>
+                <a:ea typeface="Arial Black" pitchFamily="34" charset="-122"/>
+                <a:cs typeface="Arial Black" pitchFamily="34" charset="-120"/>
+              </a:rPr>
+              <a:t>25</a:t>
+            </a:r>
+            <a:endParaRPr lang="en-US" sz="16800" dirty="0"/>
+          </a:p>
+        </p:txBody>
+      </p:sp>
+      <p:sp>
+        <p:nvSpPr>
+          <p:cNvPr id="10" name="Shape 8"/>
+          <p:cNvSpPr/>
+          <p:nvPr/>
+        </p:nvSpPr>
+        <p:spPr>
+          <a:xfrm>
+            <a:off x="6492240" y="4983480"/>
+            <a:ext cx="4892040" cy="64008"/>
+          </a:xfrm>
+          <a:prstGeom prst="rect">
+            <a:avLst/>
+          </a:prstGeom>
+          <a:solidFill>
+            <a:srgbClr val="E8412F"/>
+          </a:solidFill>
+          <a:ln/>
+        </p:spPr>
+      </p:sp>
+      <p:sp>
+        <p:nvSpPr>
+          <p:cNvPr id="11" name="Text 9"/>
+          <p:cNvSpPr txBox="1"/>
+          <p:nvPr/>
+        </p:nvSpPr>
+        <p:spPr>
+          <a:xfrm>
+            <a:off x="6492240" y="5184648"/>
+            <a:ext cx="4709160" cy="914400"/>
+          </a:xfrm>
+          <a:prstGeom prst="rect">
+            <a:avLst/>
+          </a:prstGeom>
+          <a:noFill/>
+          <a:ln/>
+        </p:spPr>
+        <p:txBody>
+          <a:bodyPr wrap="square" lIns="0" tIns="0" rIns="0" bIns="0" rtlCol="0" anchor="t"/>
+          <a:lstStyle/>
+          <a:p>
+            <a:pPr indent="0" marL="0">
+              <a:lnSpc>
+                <a:spcPts val="2400"/>
+              </a:lnSpc>
+              <a:buNone/>
+            </a:pPr>
+            <a:r>
+              <a:rPr lang="en-US" sz="1550" dirty="0">
+                <a:solidFill>
+                  <a:srgbClr val="FFFFFF"/>
+                </a:solidFill>
+                <a:latin typeface="Arial" pitchFamily="34" charset="0"/>
+                <a:ea typeface="Arial" pitchFamily="34" charset="-122"/>
+                <a:cs typeface="Arial" pitchFamily="34" charset="-120"/>
+              </a:rPr>
+              <a:t>It reads the physical evidence, so a good-looking file does not hide anything from it.</a:t>
+            </a:r>
+            <a:endParaRPr lang="en-US" sz="1550" dirty="0"/>
+          </a:p>
+        </p:txBody>
+      </p:sp>
+      <p:sp>
+        <p:nvSpPr>
+          <p:cNvPr id="12" name="Text 10"/>
+          <p:cNvSpPr txBox="1"/>
+          <p:nvPr/>
+        </p:nvSpPr>
+        <p:spPr>
+          <a:xfrm>
+            <a:off x="822960" y="5943600"/>
+            <a:ext cx="10545775" cy="457200"/>
+          </a:xfrm>
+          <a:prstGeom prst="rect">
+            <a:avLst/>
+          </a:prstGeom>
+          <a:noFill/>
+          <a:ln/>
+        </p:spPr>
+        <p:txBody>
+          <a:bodyPr wrap="square" lIns="0" tIns="0" rIns="0" bIns="0" rtlCol="0" anchor="ctr"/>
+          <a:lstStyle/>
+          <a:p>
+            <a:pPr indent="0" marL="0">
+              <a:buNone/>
+            </a:pPr>
+            <a:r>
+              <a:rPr lang="en-US" sz="1500" b="1" dirty="0">
+                <a:solidFill>
+                  <a:srgbClr val="FFFFFF"/>
+                </a:solidFill>
+                <a:latin typeface="Arial" pitchFamily="34" charset="0"/>
+                <a:ea typeface="Arial" pitchFamily="34" charset="-122"/>
+                <a:cs typeface="Arial" pitchFamily="34" charset="-120"/>
+              </a:rPr>
+              <a:t>A failure on a bridge the file still calls fine is the only kind that carries a warning. That column is the product.</a:t>
+            </a:r>
+            <a:endParaRPr lang="en-US" sz="1500" dirty="0"/>
+          </a:p>
+        </p:txBody>
+      </p:sp>
+    </p:spTree>
+  </p:cSld>
+  <p:clrMapOvr>
+    <a:masterClrMapping/>
+  </p:clrMapOvr>
+</p:sld>
+</file>
+
+<file path=ppt/slides/slide12.xml><?xml version="1.0" encoding="utf-8"?>
+<p:sld xmlns:a="http://schemas.openxmlformats.org/drawingml/2006/main" xmlns:r="http://schemas.openxmlformats.org/officeDocument/2006/relationships" xmlns:p="http://schemas.openxmlformats.org/presentationml/2006/main">
+  <p:cSld name="Slide 12">
     <p:bg>
       <p:bgPr>
         <a:solidFill>
@@ -2582,13 +3014,13 @@
             <a:r>
               <a:rPr lang="en-US" sz="1000" b="1" spc="180" kern="0" dirty="0">
                 <a:solidFill>
-                  <a:srgbClr val="767B84"/>
+                  <a:srgbClr val="E8412F"/>
                 </a:solidFill>
                 <a:latin typeface="Courier New" pitchFamily="34" charset="0"/>
                 <a:ea typeface="Courier New" pitchFamily="34" charset="-122"/>
                 <a:cs typeface="Courier New" pitchFamily="34" charset="-120"/>
               </a:rPr>
-              <a:t>THE SAME 108 FAILURES, TWO WAYS OF CHOOSING</a:t>
+              <a:t>AND YOU CAN TEST IT YOURSELF, RIGHT NOW</a:t>
             </a:r>
             <a:endParaRPr lang="en-US" sz="1000" dirty="0"/>
           </a:p>
@@ -2603,7 +3035,7 @@
         <p:spPr>
           <a:xfrm>
             <a:off x="822960" y="1115568"/>
-            <a:ext cx="10545775" cy="822960"/>
+            <a:ext cx="5577840" cy="1463040"/>
           </a:xfrm>
           <a:prstGeom prst="rect">
             <a:avLst/>
@@ -2617,12 +3049,12 @@
           <a:p>
             <a:pPr indent="0" marL="0">
               <a:lnSpc>
-                <a:spcPts val="4704"/>
+                <a:spcPts val="3360"/>
               </a:lnSpc>
               <a:buNone/>
             </a:pPr>
             <a:r>
-              <a:rPr lang="en-US" sz="4200" b="1" dirty="0">
+              <a:rPr lang="en-US" sz="3000" spc="-80" kern="0" dirty="0">
                 <a:solidFill>
                   <a:srgbClr val="101418"/>
                 </a:solidFill>
@@ -2630,458 +3062,26 @@
                 <a:ea typeface="Arial Black" pitchFamily="34" charset="-122"/>
                 <a:cs typeface="Arial Black" pitchFamily="34" charset="-120"/>
               </a:rPr>
-              <a:t>One of them found none.</a:t>
-            </a:r>
-            <a:endParaRPr lang="en-US" sz="4200" dirty="0"/>
-          </a:p>
-        </p:txBody>
-      </p:sp>
-      <p:sp>
-        <p:nvSpPr>
-          <p:cNvPr id="4" name="Text 2"/>
-          <p:cNvSpPr txBox="1"/>
-          <p:nvPr/>
-        </p:nvSpPr>
-        <p:spPr>
-          <a:xfrm>
-            <a:off x="822960" y="2514600"/>
-            <a:ext cx="4892040" cy="274320"/>
-          </a:xfrm>
-          <a:prstGeom prst="rect">
-            <a:avLst/>
-          </a:prstGeom>
-          <a:noFill/>
-          <a:ln/>
-        </p:spPr>
-        <p:txBody>
-          <a:bodyPr wrap="square" lIns="0" tIns="0" rIns="0" bIns="0" rtlCol="0" anchor="ctr"/>
-          <a:lstStyle/>
-          <a:p>
-            <a:pPr indent="0" marL="0">
-              <a:buNone/>
-            </a:pPr>
-            <a:r>
-              <a:rPr lang="en-US" sz="1100" b="1" spc="150" kern="0" dirty="0">
-                <a:solidFill>
-                  <a:srgbClr val="767B84"/>
-                </a:solidFill>
-                <a:latin typeface="Courier New" pitchFamily="34" charset="0"/>
-                <a:ea typeface="Courier New" pitchFamily="34" charset="-122"/>
-                <a:cs typeface="Courier New" pitchFamily="34" charset="-120"/>
-              </a:rPr>
-              <a:t>SORT BY WORST RATING</a:t>
-            </a:r>
-            <a:endParaRPr lang="en-US" sz="1100" dirty="0"/>
-          </a:p>
-        </p:txBody>
-      </p:sp>
-      <p:sp>
-        <p:nvSpPr>
-          <p:cNvPr id="5" name="Text 3"/>
-          <p:cNvSpPr txBox="1"/>
-          <p:nvPr/>
-        </p:nvSpPr>
-        <p:spPr>
-          <a:xfrm>
-            <a:off x="731520" y="2898648"/>
-            <a:ext cx="4892040" cy="1920240"/>
-          </a:xfrm>
-          <a:prstGeom prst="rect">
-            <a:avLst/>
-          </a:prstGeom>
-          <a:noFill/>
-          <a:ln/>
-        </p:spPr>
-        <p:txBody>
-          <a:bodyPr wrap="square" lIns="0" tIns="0" rIns="0" bIns="0" rtlCol="0" anchor="ctr"/>
-          <a:lstStyle/>
-          <a:p>
-            <a:pPr indent="0" marL="0">
-              <a:buNone/>
-            </a:pPr>
-            <a:r>
-              <a:rPr lang="en-US" sz="16800" b="1" spc="-600" kern="0" dirty="0">
-                <a:solidFill>
-                  <a:srgbClr val="9AA0A8"/>
+              <a:t>Pick a state and a year.</a:t>
+            </a:r>
+            <a:endParaRPr lang="en-US" sz="3000" dirty="0"/>
+          </a:p>
+          <a:p>
+            <a:pPr indent="0" marL="0">
+              <a:lnSpc>
+                <a:spcPts val="3360"/>
+              </a:lnSpc>
+              <a:buNone/>
+            </a:pPr>
+            <a:r>
+              <a:rPr lang="en-US" sz="3000" spc="-80" kern="0" dirty="0">
+                <a:solidFill>
+                  <a:srgbClr val="101418"/>
                 </a:solidFill>
                 <a:latin typeface="Arial Black" pitchFamily="34" charset="0"/>
                 <a:ea typeface="Arial Black" pitchFamily="34" charset="-122"/>
                 <a:cs typeface="Arial Black" pitchFamily="34" charset="-120"/>
               </a:rPr>
-              <a:t>0</a:t>
-            </a:r>
-            <a:endParaRPr lang="en-US" sz="16800" dirty="0"/>
-          </a:p>
-        </p:txBody>
-      </p:sp>
-      <p:sp>
-        <p:nvSpPr>
-          <p:cNvPr id="6" name="Shape 4"/>
-          <p:cNvSpPr/>
-          <p:nvPr/>
-        </p:nvSpPr>
-        <p:spPr>
-          <a:xfrm>
-            <a:off x="822960" y="4983480"/>
-            <a:ext cx="4892040" cy="36576"/>
-          </a:xfrm>
-          <a:prstGeom prst="rect">
-            <a:avLst/>
-          </a:prstGeom>
-          <a:solidFill>
-            <a:srgbClr val="C9C4BA"/>
-          </a:solidFill>
-          <a:ln/>
-        </p:spPr>
-      </p:sp>
-      <p:sp>
-        <p:nvSpPr>
-          <p:cNvPr id="7" name="Text 5"/>
-          <p:cNvSpPr txBox="1"/>
-          <p:nvPr/>
-        </p:nvSpPr>
-        <p:spPr>
-          <a:xfrm>
-            <a:off x="822960" y="5184648"/>
-            <a:ext cx="4709160" cy="914400"/>
-          </a:xfrm>
-          <a:prstGeom prst="rect">
-            <a:avLst/>
-          </a:prstGeom>
-          <a:noFill/>
-          <a:ln/>
-        </p:spPr>
-        <p:txBody>
-          <a:bodyPr wrap="square" lIns="0" tIns="0" rIns="0" bIns="0" rtlCol="0" anchor="t"/>
-          <a:lstStyle/>
-          <a:p>
-            <a:pPr indent="0" marL="0">
-              <a:lnSpc>
-                <a:spcPts val="2400"/>
-              </a:lnSpc>
-              <a:buNone/>
-            </a:pPr>
-            <a:r>
-              <a:rPr lang="en-US" sz="1550" dirty="0">
-                <a:solidFill>
-                  <a:srgbClr val="767B84"/>
-                </a:solidFill>
-                <a:latin typeface="Arial" pitchFamily="34" charset="0"/>
-                <a:ea typeface="Arial" pitchFamily="34" charset="-122"/>
-                <a:cs typeface="Arial" pitchFamily="34" charset="-120"/>
-              </a:rPr>
-              <a:t>It only ever looks at bridges the file already calls bad, so it never arrives.</a:t>
-            </a:r>
-            <a:endParaRPr lang="en-US" sz="1550" dirty="0"/>
-          </a:p>
-        </p:txBody>
-      </p:sp>
-      <p:sp>
-        <p:nvSpPr>
-          <p:cNvPr id="8" name="Text 6"/>
-          <p:cNvSpPr txBox="1"/>
-          <p:nvPr/>
-        </p:nvSpPr>
-        <p:spPr>
-          <a:xfrm>
-            <a:off x="6492240" y="2514600"/>
-            <a:ext cx="4892040" cy="274320"/>
-          </a:xfrm>
-          <a:prstGeom prst="rect">
-            <a:avLst/>
-          </a:prstGeom>
-          <a:noFill/>
-          <a:ln/>
-        </p:spPr>
-        <p:txBody>
-          <a:bodyPr wrap="square" lIns="0" tIns="0" rIns="0" bIns="0" rtlCol="0" anchor="ctr"/>
-          <a:lstStyle/>
-          <a:p>
-            <a:pPr indent="0" marL="0">
-              <a:buNone/>
-            </a:pPr>
-            <a:r>
-              <a:rPr lang="en-US" sz="1100" b="1" spc="150" kern="0" dirty="0">
-                <a:solidFill>
-                  <a:srgbClr val="E8412F"/>
-                </a:solidFill>
-                <a:latin typeface="Courier New" pitchFamily="34" charset="0"/>
-                <a:ea typeface="Courier New" pitchFamily="34" charset="-122"/>
-                <a:cs typeface="Courier New" pitchFamily="34" charset="-120"/>
-              </a:rPr>
-              <a:t>DISSENT</a:t>
-            </a:r>
-            <a:endParaRPr lang="en-US" sz="1100" dirty="0"/>
-          </a:p>
-        </p:txBody>
-      </p:sp>
-      <p:sp>
-        <p:nvSpPr>
-          <p:cNvPr id="9" name="Text 7"/>
-          <p:cNvSpPr txBox="1"/>
-          <p:nvPr/>
-        </p:nvSpPr>
-        <p:spPr>
-          <a:xfrm>
-            <a:off x="6400800" y="2898648"/>
-            <a:ext cx="4892040" cy="1920240"/>
-          </a:xfrm>
-          <a:prstGeom prst="rect">
-            <a:avLst/>
-          </a:prstGeom>
-          <a:noFill/>
-          <a:ln/>
-        </p:spPr>
-        <p:txBody>
-          <a:bodyPr wrap="square" lIns="0" tIns="0" rIns="0" bIns="0" rtlCol="0" anchor="ctr"/>
-          <a:lstStyle/>
-          <a:p>
-            <a:pPr indent="0" marL="0">
-              <a:buNone/>
-            </a:pPr>
-            <a:r>
-              <a:rPr lang="en-US" sz="16800" b="1" spc="-600" kern="0" dirty="0">
-                <a:solidFill>
-                  <a:srgbClr val="E8412F"/>
-                </a:solidFill>
-                <a:latin typeface="Arial Black" pitchFamily="34" charset="0"/>
-                <a:ea typeface="Arial Black" pitchFamily="34" charset="-122"/>
-                <a:cs typeface="Arial Black" pitchFamily="34" charset="-120"/>
-              </a:rPr>
-              <a:t>25</a:t>
-            </a:r>
-            <a:endParaRPr lang="en-US" sz="16800" dirty="0"/>
-          </a:p>
-        </p:txBody>
-      </p:sp>
-      <p:sp>
-        <p:nvSpPr>
-          <p:cNvPr id="10" name="Shape 8"/>
-          <p:cNvSpPr/>
-          <p:nvPr/>
-        </p:nvSpPr>
-        <p:spPr>
-          <a:xfrm>
-            <a:off x="6492240" y="4983480"/>
-            <a:ext cx="4892040" cy="64008"/>
-          </a:xfrm>
-          <a:prstGeom prst="rect">
-            <a:avLst/>
-          </a:prstGeom>
-          <a:solidFill>
-            <a:srgbClr val="E8412F"/>
-          </a:solidFill>
-          <a:ln/>
-        </p:spPr>
-      </p:sp>
-      <p:sp>
-        <p:nvSpPr>
-          <p:cNvPr id="11" name="Text 9"/>
-          <p:cNvSpPr txBox="1"/>
-          <p:nvPr/>
-        </p:nvSpPr>
-        <p:spPr>
-          <a:xfrm>
-            <a:off x="6492240" y="5184648"/>
-            <a:ext cx="4709160" cy="914400"/>
-          </a:xfrm>
-          <a:prstGeom prst="rect">
-            <a:avLst/>
-          </a:prstGeom>
-          <a:noFill/>
-          <a:ln/>
-        </p:spPr>
-        <p:txBody>
-          <a:bodyPr wrap="square" lIns="0" tIns="0" rIns="0" bIns="0" rtlCol="0" anchor="t"/>
-          <a:lstStyle/>
-          <a:p>
-            <a:pPr indent="0" marL="0">
-              <a:lnSpc>
-                <a:spcPts val="2400"/>
-              </a:lnSpc>
-              <a:buNone/>
-            </a:pPr>
-            <a:r>
-              <a:rPr lang="en-US" sz="1550" dirty="0">
-                <a:solidFill>
-                  <a:srgbClr val="101418"/>
-                </a:solidFill>
-                <a:latin typeface="Arial" pitchFamily="34" charset="0"/>
-                <a:ea typeface="Arial" pitchFamily="34" charset="-122"/>
-                <a:cs typeface="Arial" pitchFamily="34" charset="-120"/>
-              </a:rPr>
-              <a:t>It reads the physical evidence, so a good-looking file does not hide anything from it.</a:t>
-            </a:r>
-            <a:endParaRPr lang="en-US" sz="1550" dirty="0"/>
-          </a:p>
-        </p:txBody>
-      </p:sp>
-      <p:sp>
-        <p:nvSpPr>
-          <p:cNvPr id="12" name="Text 10"/>
-          <p:cNvSpPr txBox="1"/>
-          <p:nvPr/>
-        </p:nvSpPr>
-        <p:spPr>
-          <a:xfrm>
-            <a:off x="822960" y="5943600"/>
-            <a:ext cx="10545775" cy="457200"/>
-          </a:xfrm>
-          <a:prstGeom prst="rect">
-            <a:avLst/>
-          </a:prstGeom>
-          <a:noFill/>
-          <a:ln/>
-        </p:spPr>
-        <p:txBody>
-          <a:bodyPr wrap="square" lIns="0" tIns="0" rIns="0" bIns="0" rtlCol="0" anchor="ctr"/>
-          <a:lstStyle/>
-          <a:p>
-            <a:pPr indent="0" marL="0">
-              <a:buNone/>
-            </a:pPr>
-            <a:r>
-              <a:rPr lang="en-US" sz="1500" b="1" dirty="0">
-                <a:solidFill>
-                  <a:srgbClr val="101418"/>
-                </a:solidFill>
-                <a:latin typeface="Arial" pitchFamily="34" charset="0"/>
-                <a:ea typeface="Arial" pitchFamily="34" charset="-122"/>
-                <a:cs typeface="Arial" pitchFamily="34" charset="-120"/>
-              </a:rPr>
-              <a:t>A failure on a bridge the file still calls fine is the only kind that carries a warning. That column is the product.</a:t>
-            </a:r>
-            <a:endParaRPr lang="en-US" sz="1500" dirty="0"/>
-          </a:p>
-        </p:txBody>
-      </p:sp>
-    </p:spTree>
-  </p:cSld>
-  <p:clrMapOvr>
-    <a:masterClrMapping/>
-  </p:clrMapOvr>
-</p:sld>
-</file>
-
-<file path=ppt/slides/slide12.xml><?xml version="1.0" encoding="utf-8"?>
-<p:sld xmlns:a="http://schemas.openxmlformats.org/drawingml/2006/main" xmlns:r="http://schemas.openxmlformats.org/officeDocument/2006/relationships" xmlns:p="http://schemas.openxmlformats.org/presentationml/2006/main">
-  <p:cSld name="Slide 12">
-    <p:bg>
-      <p:bgPr>
-        <a:solidFill>
-          <a:srgbClr val="101418"/>
-        </a:solidFill>
-      </p:bgPr>
-    </p:bg>
-    <p:spTree>
-      <p:nvGrpSpPr>
-        <p:cNvPr id="1" name=""/>
-        <p:cNvGrpSpPr/>
-        <p:nvPr/>
-      </p:nvGrpSpPr>
-      <p:grpSpPr>
-        <a:xfrm>
-          <a:off x="0" y="0"/>
-          <a:ext cx="0" cy="0"/>
-          <a:chOff x="0" y="0"/>
-          <a:chExt cx="0" cy="0"/>
-        </a:xfrm>
-      </p:grpSpPr>
-      <p:sp>
-        <p:nvSpPr>
-          <p:cNvPr id="2" name="Text 0"/>
-          <p:cNvSpPr txBox="1"/>
-          <p:nvPr/>
-        </p:nvSpPr>
-        <p:spPr>
-          <a:xfrm>
-            <a:off x="822960" y="777240"/>
-            <a:ext cx="8229600" cy="237744"/>
-          </a:xfrm>
-          <a:prstGeom prst="rect">
-            <a:avLst/>
-          </a:prstGeom>
-          <a:noFill/>
-          <a:ln/>
-        </p:spPr>
-        <p:txBody>
-          <a:bodyPr wrap="square" lIns="0" tIns="0" rIns="0" bIns="0" rtlCol="0" anchor="t"/>
-          <a:lstStyle/>
-          <a:p>
-            <a:pPr algn="l" indent="0" marL="0">
-              <a:buNone/>
-            </a:pPr>
-            <a:r>
-              <a:rPr lang="en-US" sz="1000" b="1" spc="180" kern="0" dirty="0">
-                <a:solidFill>
-                  <a:srgbClr val="E8412F"/>
-                </a:solidFill>
-                <a:latin typeface="Courier New" pitchFamily="34" charset="0"/>
-                <a:ea typeface="Courier New" pitchFamily="34" charset="-122"/>
-                <a:cs typeface="Courier New" pitchFamily="34" charset="-120"/>
-              </a:rPr>
-              <a:t>AND YOU CAN TEST IT YOURSELF, RIGHT NOW</a:t>
-            </a:r>
-            <a:endParaRPr lang="en-US" sz="1000" dirty="0"/>
-          </a:p>
-        </p:txBody>
-      </p:sp>
-      <p:sp>
-        <p:nvSpPr>
-          <p:cNvPr id="3" name="Text 1"/>
-          <p:cNvSpPr txBox="1"/>
-          <p:nvPr/>
-        </p:nvSpPr>
-        <p:spPr>
-          <a:xfrm>
-            <a:off x="822960" y="1115568"/>
-            <a:ext cx="5577840" cy="1463040"/>
-          </a:xfrm>
-          <a:prstGeom prst="rect">
-            <a:avLst/>
-          </a:prstGeom>
-          <a:noFill/>
-          <a:ln/>
-        </p:spPr>
-        <p:txBody>
-          <a:bodyPr wrap="square" lIns="0" tIns="0" rIns="0" bIns="0" rtlCol="0" anchor="t"/>
-          <a:lstStyle/>
-          <a:p>
-            <a:pPr indent="0" marL="0">
-              <a:lnSpc>
-                <a:spcPts val="3360"/>
-              </a:lnSpc>
-              <a:buNone/>
-            </a:pPr>
-            <a:r>
-              <a:rPr lang="en-US" sz="3000" b="1" dirty="0">
-                <a:solidFill>
-                  <a:srgbClr val="FFFFFF"/>
-                </a:solidFill>
-                <a:latin typeface="Arial Black" pitchFamily="34" charset="0"/>
-                <a:ea typeface="Arial Black" pitchFamily="34" charset="-122"/>
-                <a:cs typeface="Arial Black" pitchFamily="34" charset="-120"/>
-              </a:rPr>
-              <a:t>Pick a state and a year.</a:t>
-            </a:r>
-            <a:endParaRPr lang="en-US" sz="3000" dirty="0"/>
-          </a:p>
-          <a:p>
-            <a:pPr indent="0" marL="0">
-              <a:lnSpc>
-                <a:spcPts val="3360"/>
-              </a:lnSpc>
-              <a:buNone/>
-            </a:pPr>
-            <a:r>
-              <a:rPr lang="en-US" sz="3000" b="1" dirty="0">
-                <a:solidFill>
-                  <a:srgbClr val="FFFFFF"/>
-                </a:solidFill>
-                <a:latin typeface="Arial Black" pitchFamily="34" charset="0"/>
-                <a:ea typeface="Arial Black" pitchFamily="34" charset="-122"/>
-                <a:cs typeface="Arial Black" pitchFamily="34" charset="-120"/>
-              </a:rPr>
               <a:t>It grades itself.</a:t>
             </a:r>
             <a:endParaRPr lang="en-US" sz="3000" dirty="0"/>
@@ -3118,7 +3118,7 @@
             <a:r>
               <a:rPr lang="en-US" sz="1450" dirty="0">
                 <a:solidFill>
-                  <a:srgbClr val="8A8F98"/>
+                  <a:srgbClr val="767B84"/>
                 </a:solidFill>
                 <a:latin typeface="Arial" pitchFamily="34" charset="0"/>
                 <a:ea typeface="Arial" pitchFamily="34" charset="-122"/>
@@ -3152,13 +3152,6 @@
           <a:prstGeom prst="rect">
             <a:avLst/>
           </a:prstGeom>
-          <a:effectLst>
-            <a:outerShdw sx="100000" sy="100000" kx="0" ky="0" algn="bl" rotWithShape="0" blurRad="330200" dist="101600" dir="5400000">
-              <a:srgbClr val="000000">
-                <a:alpha val="34000"/>
-              </a:srgbClr>
-            </a:outerShdw>
-          </a:effectLst>
         </p:spPr>
       </p:pic>
       <p:sp>
@@ -3225,9 +3218,9 @@
               <a:buNone/>
             </a:pPr>
             <a:r>
-              <a:rPr lang="en-US" sz="2700" b="1" dirty="0">
-                <a:solidFill>
-                  <a:srgbClr val="FFFFFF"/>
+              <a:rPr lang="en-US" sz="2700" dirty="0">
+                <a:solidFill>
+                  <a:srgbClr val="101418"/>
                 </a:solidFill>
                 <a:latin typeface="Arial Black" pitchFamily="34" charset="0"/>
                 <a:ea typeface="Arial Black" pitchFamily="34" charset="-122"/>
@@ -3266,7 +3259,7 @@
             <a:r>
               <a:rPr lang="en-US" sz="1350" dirty="0">
                 <a:solidFill>
-                  <a:srgbClr val="8A8F98"/>
+                  <a:srgbClr val="767B84"/>
                 </a:solidFill>
                 <a:latin typeface="Arial" pitchFamily="34" charset="0"/>
                 <a:ea typeface="Arial" pitchFamily="34" charset="-122"/>
@@ -3303,9 +3296,9 @@
               <a:buNone/>
             </a:pPr>
             <a:r>
-              <a:rPr lang="en-US" sz="2700" b="1" dirty="0">
-                <a:solidFill>
-                  <a:srgbClr val="FFFFFF"/>
+              <a:rPr lang="en-US" sz="2700" dirty="0">
+                <a:solidFill>
+                  <a:srgbClr val="101418"/>
                 </a:solidFill>
                 <a:latin typeface="Arial Black" pitchFamily="34" charset="0"/>
                 <a:ea typeface="Arial Black" pitchFamily="34" charset="-122"/>
@@ -3344,7 +3337,7 @@
             <a:r>
               <a:rPr lang="en-US" sz="1350" dirty="0">
                 <a:solidFill>
-                  <a:srgbClr val="8A8F98"/>
+                  <a:srgbClr val="767B84"/>
                 </a:solidFill>
                 <a:latin typeface="Arial" pitchFamily="34" charset="0"/>
                 <a:ea typeface="Arial" pitchFamily="34" charset="-122"/>
@@ -3381,7 +3374,7 @@
               <a:buNone/>
             </a:pPr>
             <a:r>
-              <a:rPr lang="en-US" sz="2100" b="1" dirty="0">
+              <a:rPr lang="en-US" sz="2100" dirty="0">
                 <a:solidFill>
                   <a:srgbClr val="E8412F"/>
                 </a:solidFill>
@@ -3422,7 +3415,7 @@
             <a:r>
               <a:rPr lang="en-US" sz="1350" dirty="0">
                 <a:solidFill>
-                  <a:srgbClr val="FFFFFF"/>
+                  <a:srgbClr val="101418"/>
                 </a:solidFill>
                 <a:latin typeface="Arial" pitchFamily="34" charset="0"/>
                 <a:ea typeface="Arial" pitchFamily="34" charset="-122"/>
@@ -3575,7 +3568,7 @@
               <a:buNone/>
             </a:pPr>
             <a:r>
-              <a:rPr lang="en-US" sz="4000" b="1" dirty="0">
+              <a:rPr lang="en-US" sz="4000" spc="-80" kern="0" dirty="0">
                 <a:solidFill>
                   <a:srgbClr val="101418"/>
                 </a:solidFill>
@@ -4018,7 +4011,7 @@
               <a:buNone/>
             </a:pPr>
             <a:r>
-              <a:rPr lang="en-US" sz="2000" b="1" dirty="0">
+              <a:rPr lang="en-US" sz="2000" dirty="0">
                 <a:solidFill>
                   <a:srgbClr val="101418"/>
                 </a:solidFill>
@@ -4131,7 +4124,7 @@
               <a:buNone/>
             </a:pPr>
             <a:r>
-              <a:rPr lang="en-US" sz="5200" b="1" dirty="0">
+              <a:rPr lang="en-US" sz="5200" spc="-150" kern="0" dirty="0">
                 <a:solidFill>
                   <a:srgbClr val="FFFFFF"/>
                 </a:solidFill>
@@ -4151,7 +4144,7 @@
               <a:buNone/>
             </a:pPr>
             <a:r>
-              <a:rPr lang="en-US" sz="5200" b="1" dirty="0">
+              <a:rPr lang="en-US" sz="5200" spc="-150" kern="0" dirty="0">
                 <a:solidFill>
                   <a:srgbClr val="FFFFFF"/>
                 </a:solidFill>
@@ -4596,7 +4589,7 @@
               <a:buNone/>
             </a:pPr>
             <a:r>
-              <a:rPr lang="en-US" sz="20000" b="1" spc="-600" kern="0" dirty="0">
+              <a:rPr lang="en-US" sz="20000" spc="-600" kern="0" dirty="0">
                 <a:solidFill>
                   <a:srgbClr val="FFFFFF"/>
                 </a:solidFill>
@@ -4610,7 +4603,7 @@
               <a:buNone/>
             </a:pPr>
             <a:r>
-              <a:rPr lang="en-US" sz="4800" b="1" dirty="0">
+              <a:rPr lang="en-US" sz="4800" dirty="0">
                 <a:solidFill>
                   <a:srgbClr val="E8412F"/>
                 </a:solidFill>
@@ -4652,7 +4645,7 @@
               <a:buNone/>
             </a:pPr>
             <a:r>
-              <a:rPr lang="en-US" sz="3200" b="1" dirty="0">
+              <a:rPr lang="en-US" sz="3200" spc="-70" kern="0" dirty="0">
                 <a:solidFill>
                   <a:srgbClr val="FFFFFF"/>
                 </a:solidFill>
@@ -4827,7 +4820,7 @@
               <a:buNone/>
             </a:pPr>
             <a:r>
-              <a:rPr lang="en-US" sz="4400" b="1" dirty="0">
+              <a:rPr lang="en-US" sz="4400" spc="-80" kern="0" dirty="0">
                 <a:solidFill>
                   <a:srgbClr val="101418"/>
                 </a:solidFill>
@@ -5141,7 +5134,7 @@
     <p:bg>
       <p:bgPr>
         <a:solidFill>
-          <a:srgbClr val="1F4FD8"/>
+          <a:srgbClr val="F4F1EA"/>
         </a:solidFill>
       </p:bgPr>
     </p:bg>
@@ -5186,7 +5179,7 @@
             <a:r>
               <a:rPr lang="en-US" sz="1000" b="1" spc="180" kern="0" dirty="0">
                 <a:solidFill>
-                  <a:srgbClr val="AFC2FF"/>
+                  <a:srgbClr val="E8412F"/>
                 </a:solidFill>
                 <a:latin typeface="Courier New" pitchFamily="34" charset="0"/>
                 <a:ea typeface="Courier New" pitchFamily="34" charset="-122"/>
@@ -5226,9 +5219,9 @@
               <a:buNone/>
             </a:pPr>
             <a:r>
-              <a:rPr lang="en-US" sz="3800" b="1" dirty="0">
-                <a:solidFill>
-                  <a:srgbClr val="FFFFFF"/>
+              <a:rPr lang="en-US" sz="3800" spc="-80" kern="0" dirty="0">
+                <a:solidFill>
+                  <a:srgbClr val="101418"/>
                 </a:solidFill>
                 <a:latin typeface="Arial Black" pitchFamily="34" charset="0"/>
                 <a:ea typeface="Arial Black" pitchFamily="34" charset="-122"/>
@@ -5246,9 +5239,9 @@
               <a:buNone/>
             </a:pPr>
             <a:r>
-              <a:rPr lang="en-US" sz="3800" b="1" dirty="0">
-                <a:solidFill>
-                  <a:srgbClr val="FFFFFF"/>
+              <a:rPr lang="en-US" sz="3800" spc="-80" kern="0" dirty="0">
+                <a:solidFill>
+                  <a:srgbClr val="101418"/>
                 </a:solidFill>
                 <a:latin typeface="Arial Black" pitchFamily="34" charset="0"/>
                 <a:ea typeface="Arial Black" pitchFamily="34" charset="-122"/>
@@ -5268,14 +5261,14 @@
         </p:nvSpPr>
         <p:spPr>
           <a:xfrm>
-            <a:off x="822960" y="3200400"/>
+            <a:off x="822960" y="3154680"/>
             <a:ext cx="4892040" cy="1920240"/>
           </a:xfrm>
           <a:prstGeom prst="rect">
             <a:avLst/>
           </a:prstGeom>
           <a:solidFill>
-            <a:srgbClr val="FFFFFF"/>
+            <a:srgbClr val="6B7280"/>
           </a:solidFill>
           <a:ln/>
         </p:spPr>
@@ -5288,7 +5281,7 @@
         </p:nvSpPr>
         <p:spPr>
           <a:xfrm>
-            <a:off x="1133856" y="3493008"/>
+            <a:off x="1133856" y="3447288"/>
             <a:ext cx="4270248" cy="274320"/>
           </a:xfrm>
           <a:prstGeom prst="rect">
@@ -5305,9 +5298,9 @@
               <a:buNone/>
             </a:pPr>
             <a:r>
-              <a:rPr lang="en-US" sz="1100" b="1" spc="150" kern="0" dirty="0">
-                <a:solidFill>
-                  <a:srgbClr val="767B84"/>
+              <a:rPr lang="en-US" sz="1100" b="1" spc="180" kern="0" dirty="0">
+                <a:solidFill>
+                  <a:srgbClr val="E4E6E9"/>
                 </a:solidFill>
                 <a:latin typeface="Courier New" pitchFamily="34" charset="0"/>
                 <a:ea typeface="Courier New" pitchFamily="34" charset="-122"/>
@@ -5327,7 +5320,7 @@
         </p:nvSpPr>
         <p:spPr>
           <a:xfrm>
-            <a:off x="1133856" y="3858768"/>
+            <a:off x="1133856" y="3813048"/>
             <a:ext cx="4270248" cy="822960"/>
           </a:xfrm>
           <a:prstGeom prst="rect">
@@ -5347,9 +5340,9 @@
               <a:buNone/>
             </a:pPr>
             <a:r>
-              <a:rPr lang="en-US" sz="2400" b="1" dirty="0">
-                <a:solidFill>
-                  <a:srgbClr val="101418"/>
+              <a:rPr lang="en-US" sz="2400" spc="-50" kern="0" dirty="0">
+                <a:solidFill>
+                  <a:srgbClr val="FFFFFF"/>
                 </a:solidFill>
                 <a:latin typeface="Arial Black" pitchFamily="34" charset="0"/>
                 <a:ea typeface="Arial Black" pitchFamily="34" charset="-122"/>
@@ -5367,9 +5360,9 @@
               <a:buNone/>
             </a:pPr>
             <a:r>
-              <a:rPr lang="en-US" sz="2400" b="1" dirty="0">
-                <a:solidFill>
-                  <a:srgbClr val="101418"/>
+              <a:rPr lang="en-US" sz="2400" spc="-50" kern="0" dirty="0">
+                <a:solidFill>
+                  <a:srgbClr val="FFFFFF"/>
                 </a:solidFill>
                 <a:latin typeface="Arial Black" pitchFamily="34" charset="0"/>
                 <a:ea typeface="Arial Black" pitchFamily="34" charset="-122"/>
@@ -5389,7 +5382,7 @@
         </p:nvSpPr>
         <p:spPr>
           <a:xfrm>
-            <a:off x="1133856" y="4681728"/>
+            <a:off x="1133856" y="4636008"/>
             <a:ext cx="4270248" cy="365760"/>
           </a:xfrm>
           <a:prstGeom prst="rect">
@@ -5408,7 +5401,7 @@
             <a:r>
               <a:rPr lang="en-US" sz="1300" dirty="0">
                 <a:solidFill>
-                  <a:srgbClr val="767B84"/>
+                  <a:srgbClr val="E4E6E9"/>
                 </a:solidFill>
                 <a:latin typeface="Arial" pitchFamily="34" charset="0"/>
                 <a:ea typeface="Arial" pitchFamily="34" charset="-122"/>
@@ -5428,7 +5421,7 @@
         </p:nvSpPr>
         <p:spPr>
           <a:xfrm>
-            <a:off x="6492240" y="3200400"/>
+            <a:off x="6492240" y="3154680"/>
             <a:ext cx="4892040" cy="1920240"/>
           </a:xfrm>
           <a:prstGeom prst="rect">
@@ -5448,7 +5441,7 @@
         </p:nvSpPr>
         <p:spPr>
           <a:xfrm>
-            <a:off x="6803136" y="3493008"/>
+            <a:off x="6803136" y="3447288"/>
             <a:ext cx="4270248" cy="274320"/>
           </a:xfrm>
           <a:prstGeom prst="rect">
@@ -5465,9 +5458,9 @@
               <a:buNone/>
             </a:pPr>
             <a:r>
-              <a:rPr lang="en-US" sz="1100" b="1" spc="150" kern="0" dirty="0">
-                <a:solidFill>
-                  <a:srgbClr val="AFC2FF"/>
+              <a:rPr lang="en-US" sz="1100" b="1" spc="180" kern="0" dirty="0">
+                <a:solidFill>
+                  <a:srgbClr val="6E9CFF"/>
                 </a:solidFill>
                 <a:latin typeface="Courier New" pitchFamily="34" charset="0"/>
                 <a:ea typeface="Courier New" pitchFamily="34" charset="-122"/>
@@ -5487,7 +5480,7 @@
         </p:nvSpPr>
         <p:spPr>
           <a:xfrm>
-            <a:off x="6803136" y="3858768"/>
+            <a:off x="6803136" y="3813048"/>
             <a:ext cx="4270248" cy="822960"/>
           </a:xfrm>
           <a:prstGeom prst="rect">
@@ -5507,7 +5500,7 @@
               <a:buNone/>
             </a:pPr>
             <a:r>
-              <a:rPr lang="en-US" sz="2400" b="1" dirty="0">
+              <a:rPr lang="en-US" sz="2400" spc="-50" kern="0" dirty="0">
                 <a:solidFill>
                   <a:srgbClr val="FFFFFF"/>
                 </a:solidFill>
@@ -5527,7 +5520,7 @@
               <a:buNone/>
             </a:pPr>
             <a:r>
-              <a:rPr lang="en-US" sz="2400" b="1" dirty="0">
+              <a:rPr lang="en-US" sz="2400" spc="-50" kern="0" dirty="0">
                 <a:solidFill>
                   <a:srgbClr val="FFFFFF"/>
                 </a:solidFill>
@@ -5549,7 +5542,7 @@
         </p:nvSpPr>
         <p:spPr>
           <a:xfrm>
-            <a:off x="6803136" y="4681728"/>
+            <a:off x="6803136" y="4636008"/>
             <a:ext cx="4270248" cy="365760"/>
           </a:xfrm>
           <a:prstGeom prst="rect">
@@ -5588,8 +5581,8 @@
         </p:nvSpPr>
         <p:spPr>
           <a:xfrm>
-            <a:off x="822960" y="5504688"/>
-            <a:ext cx="10545775" cy="658368"/>
+            <a:off x="822960" y="5440680"/>
+            <a:ext cx="10545775" cy="640080"/>
           </a:xfrm>
           <a:prstGeom prst="rect">
             <a:avLst/>
@@ -5608,8 +5601,8 @@
         </p:nvSpPr>
         <p:spPr>
           <a:xfrm>
-            <a:off x="822960" y="5669280"/>
-            <a:ext cx="10545775" cy="365760"/>
+            <a:off x="1133856" y="5586984"/>
+            <a:ext cx="9923983" cy="365760"/>
           </a:xfrm>
           <a:prstGeom prst="rect">
             <a:avLst/>
@@ -5621,11 +5614,11 @@
           <a:bodyPr wrap="square" lIns="0" tIns="0" rIns="0" bIns="0" rtlCol="0" anchor="ctr"/>
           <a:lstStyle/>
           <a:p>
-            <a:pPr algn="ctr" indent="0" marL="0">
-              <a:buNone/>
-            </a:pPr>
-            <a:r>
-              <a:rPr lang="en-US" sz="1900" b="1" dirty="0">
+            <a:pPr indent="0" marL="0">
+              <a:buNone/>
+            </a:pPr>
+            <a:r>
+              <a:rPr lang="en-US" sz="1900" spc="-40" kern="0" dirty="0">
                 <a:solidFill>
                   <a:srgbClr val="FFFFFF"/>
                 </a:solidFill>
@@ -5653,7 +5646,7 @@
     <p:bg>
       <p:bgPr>
         <a:solidFill>
-          <a:srgbClr val="101418"/>
+          <a:srgbClr val="F4F1EA"/>
         </a:solidFill>
       </p:bgPr>
     </p:bg>
@@ -5738,9 +5731,9 @@
               <a:buNone/>
             </a:pPr>
             <a:r>
-              <a:rPr lang="en-US" sz="4400" b="1" dirty="0">
-                <a:solidFill>
-                  <a:srgbClr val="FFFFFF"/>
+              <a:rPr lang="en-US" sz="4400" spc="-80" kern="0" dirty="0">
+                <a:solidFill>
+                  <a:srgbClr val="101418"/>
                 </a:solidFill>
                 <a:latin typeface="Arial Black" pitchFamily="34" charset="0"/>
                 <a:ea typeface="Arial Black" pitchFamily="34" charset="-122"/>
@@ -5758,9 +5751,9 @@
               <a:buNone/>
             </a:pPr>
             <a:r>
-              <a:rPr lang="en-US" sz="4400" b="1" dirty="0">
-                <a:solidFill>
-                  <a:srgbClr val="FFFFFF"/>
+              <a:rPr lang="en-US" sz="4400" spc="-80" kern="0" dirty="0">
+                <a:solidFill>
+                  <a:srgbClr val="101418"/>
                 </a:solidFill>
                 <a:latin typeface="Arial Black" pitchFamily="34" charset="0"/>
                 <a:ea typeface="Arial Black" pitchFamily="34" charset="-122"/>
@@ -5802,7 +5795,7 @@
             <a:r>
               <a:rPr lang="en-US" sz="1500" dirty="0">
                 <a:solidFill>
-                  <a:srgbClr val="8A8F98"/>
+                  <a:srgbClr val="767B84"/>
                 </a:solidFill>
                 <a:latin typeface="Arial" pitchFamily="34" charset="0"/>
                 <a:ea typeface="Arial" pitchFamily="34" charset="-122"/>
@@ -5898,13 +5891,6 @@
           <a:prstGeom prst="rect">
             <a:avLst/>
           </a:prstGeom>
-          <a:effectLst>
-            <a:outerShdw sx="100000" sy="100000" kx="0" ky="0" algn="bl" rotWithShape="0" blurRad="330200" dist="101600" dir="5400000">
-              <a:srgbClr val="000000">
-                <a:alpha val="34000"/>
-              </a:srgbClr>
-            </a:outerShdw>
-          </a:effectLst>
         </p:spPr>
       </p:pic>
     </p:spTree>
@@ -5921,7 +5907,7 @@
     <p:bg>
       <p:bgPr>
         <a:solidFill>
-          <a:srgbClr val="101418"/>
+          <a:srgbClr val="F4F1EA"/>
         </a:solidFill>
       </p:bgPr>
     </p:bg>
@@ -5947,7 +5933,7 @@
         </p:nvSpPr>
         <p:spPr>
           <a:xfrm>
-            <a:off x="822960" y="713232"/>
+            <a:off x="822960" y="777240"/>
             <a:ext cx="5486400" cy="237744"/>
           </a:xfrm>
           <a:prstGeom prst="rect">
@@ -6003,9 +5989,9 @@
               <a:buNone/>
             </a:pPr>
             <a:r>
-              <a:rPr lang="en-US" sz="6200" b="1" spc="-100" kern="0" dirty="0">
-                <a:solidFill>
-                  <a:srgbClr val="FFFFFF"/>
+              <a:rPr lang="en-US" sz="6200" spc="-190" kern="0" dirty="0">
+                <a:solidFill>
+                  <a:srgbClr val="101418"/>
                 </a:solidFill>
                 <a:latin typeface="Arial Black" pitchFamily="34" charset="0"/>
                 <a:ea typeface="Arial Black" pitchFamily="34" charset="-122"/>
@@ -6017,9 +6003,9 @@
               <a:buNone/>
             </a:pPr>
             <a:r>
-              <a:rPr lang="en-US" sz="3000" b="1" dirty="0">
-                <a:solidFill>
-                  <a:srgbClr val="8A8F98"/>
+              <a:rPr lang="en-US" sz="3000" dirty="0">
+                <a:solidFill>
+                  <a:srgbClr val="767B84"/>
                 </a:solidFill>
                 <a:latin typeface="Arial Black" pitchFamily="34" charset="0"/>
                 <a:ea typeface="Arial Black" pitchFamily="34" charset="-122"/>
@@ -6061,7 +6047,7 @@
             <a:r>
               <a:rPr lang="en-US" sz="1500" dirty="0">
                 <a:solidFill>
-                  <a:srgbClr val="8A8F98"/>
+                  <a:srgbClr val="767B84"/>
                 </a:solidFill>
                 <a:latin typeface="Arial" pitchFamily="34" charset="0"/>
                 <a:ea typeface="Arial" pitchFamily="34" charset="-122"/>
@@ -6095,13 +6081,6 @@
           <a:prstGeom prst="rect">
             <a:avLst/>
           </a:prstGeom>
-          <a:effectLst>
-            <a:outerShdw sx="100000" sy="100000" kx="0" ky="0" algn="bl" rotWithShape="0" blurRad="330200" dist="101600" dir="5400000">
-              <a:srgbClr val="000000">
-                <a:alpha val="34000"/>
-              </a:srgbClr>
-            </a:outerShdw>
-          </a:effectLst>
         </p:spPr>
       </p:pic>
     </p:spTree>
@@ -6203,7 +6182,7 @@
               <a:buNone/>
             </a:pPr>
             <a:r>
-              <a:rPr lang="en-US" sz="4200" b="1" dirty="0">
+              <a:rPr lang="en-US" sz="4200" spc="-80" kern="0" dirty="0">
                 <a:solidFill>
                   <a:srgbClr val="101418"/>
                 </a:solidFill>
@@ -6242,7 +6221,7 @@
               <a:buNone/>
             </a:pPr>
             <a:r>
-              <a:rPr lang="en-US" sz="4600" b="1" spc="-100" kern="0" dirty="0">
+              <a:rPr lang="en-US" sz="4600" spc="-140" kern="0" dirty="0">
                 <a:solidFill>
                   <a:srgbClr val="C9C4BA"/>
                 </a:solidFill>
@@ -6382,7 +6361,7 @@
               <a:buNone/>
             </a:pPr>
             <a:r>
-              <a:rPr lang="en-US" sz="4600" b="1" spc="-100" kern="0" dirty="0">
+              <a:rPr lang="en-US" sz="4600" spc="-140" kern="0" dirty="0">
                 <a:solidFill>
                   <a:srgbClr val="C9C4BA"/>
                 </a:solidFill>
@@ -6522,7 +6501,7 @@
               <a:buNone/>
             </a:pPr>
             <a:r>
-              <a:rPr lang="en-US" sz="4600" b="1" spc="-100" kern="0" dirty="0">
+              <a:rPr lang="en-US" sz="4600" spc="-140" kern="0" dirty="0">
                 <a:solidFill>
                   <a:srgbClr val="C9C4BA"/>
                 </a:solidFill>
@@ -6662,7 +6641,7 @@
               <a:buNone/>
             </a:pPr>
             <a:r>
-              <a:rPr lang="en-US" sz="4600" b="1" spc="-100" kern="0" dirty="0">
+              <a:rPr lang="en-US" sz="4600" spc="-140" kern="0" dirty="0">
                 <a:solidFill>
                   <a:srgbClr val="E8412F"/>
                 </a:solidFill>
@@ -6918,7 +6897,7 @@
               <a:buNone/>
             </a:pPr>
             <a:r>
-              <a:rPr lang="en-US" sz="4200" b="1" dirty="0">
+              <a:rPr lang="en-US" sz="4200" spc="-80" kern="0" dirty="0">
                 <a:solidFill>
                   <a:srgbClr val="101418"/>
                 </a:solidFill>
@@ -7523,7 +7502,7 @@
               <a:buNone/>
             </a:pPr>
             <a:r>
-              <a:rPr lang="en-US" sz="4200" b="1" dirty="0">
+              <a:rPr lang="en-US" sz="4200" spc="-80" kern="0" dirty="0">
                 <a:solidFill>
                   <a:srgbClr val="FFFFFF"/>
                 </a:solidFill>
@@ -7643,7 +7622,7 @@
               <a:buNone/>
             </a:pPr>
             <a:r>
-              <a:rPr lang="en-US" sz="5400" b="1" spc="-100" kern="0" dirty="0">
+              <a:rPr lang="en-US" sz="5400" spc="-160" kern="0" dirty="0">
                 <a:solidFill>
                   <a:srgbClr val="9AA0A8"/>
                 </a:solidFill>
@@ -7760,7 +7739,7 @@
               <a:buNone/>
             </a:pPr>
             <a:r>
-              <a:rPr lang="en-US" sz="5400" b="1" spc="-100" kern="0" dirty="0">
+              <a:rPr lang="en-US" sz="5400" spc="-160" kern="0" dirty="0">
                 <a:solidFill>
                   <a:srgbClr val="FFFFFF"/>
                 </a:solidFill>
@@ -7858,7 +7837,7 @@
               <a:buNone/>
             </a:pPr>
             <a:r>
-              <a:rPr lang="en-US" sz="2100" b="1" dirty="0">
+              <a:rPr lang="en-US" sz="2100" dirty="0">
                 <a:solidFill>
                   <a:srgbClr val="E8412F"/>
                 </a:solidFill>
